--- a/课程评价系统-演示.pptx
+++ b/课程评价系统-演示.pptx
@@ -5,17 +5,17 @@
     <p:sldMasterId id="2147483648" r:id="rId1"/>
   </p:sldMasterIdLst>
   <p:sldIdLst>
-    <p:sldId id="256" r:id="rId7"/>
-    <p:sldId id="257" r:id="rId8"/>
-    <p:sldId id="258" r:id="rId9"/>
-    <p:sldId id="259" r:id="rId10"/>
-    <p:sldId id="260" r:id="rId11"/>
-    <p:sldId id="261" r:id="rId12"/>
-    <p:sldId id="262" r:id="rId13"/>
-    <p:sldId id="263" r:id="rId14"/>
-    <p:sldId id="264" r:id="rId15"/>
+    <p:sldId id="256" r:id="rId2"/>
+    <p:sldId id="257" r:id="rId3"/>
+    <p:sldId id="258" r:id="rId4"/>
+    <p:sldId id="259" r:id="rId5"/>
+    <p:sldId id="260" r:id="rId6"/>
+    <p:sldId id="261" r:id="rId7"/>
+    <p:sldId id="262" r:id="rId8"/>
+    <p:sldId id="263" r:id="rId9"/>
+    <p:sldId id="264" r:id="rId10"/>
   </p:sldIdLst>
-  <p:sldSz cx="12191695" cy="6858000" type="screen4x3"/>
+  <p:sldSz cx="12192000" cy="6858000"/>
   <p:notesSz cx="6858000" cy="9144000"/>
   <p:defaultTextStyle>
     <a:defPPr>
@@ -112,6 +112,22 @@
       </a:defRPr>
     </a:lvl9pPr>
   </p:defaultTextStyle>
+  <p:extLst>
+    <p:ext uri="{EFAFB233-063F-42B5-8137-9DF3F51BA10A}">
+      <p15:sldGuideLst xmlns:p15="http://schemas.microsoft.com/office/powerpoint/2012/main">
+        <p15:guide id="1" orient="horz" pos="2160">
+          <p15:clr>
+            <a:srgbClr val="A4A3A4"/>
+          </p15:clr>
+        </p15:guide>
+        <p15:guide id="2" pos="2880">
+          <p15:clr>
+            <a:srgbClr val="A4A3A4"/>
+          </p15:clr>
+        </p15:guide>
+      </p15:sldGuideLst>
+    </p:ext>
+  </p:extLst>
 </p:presentation>
 </file>
 
@@ -153,10 +169,9 @@
           <a:lstStyle/>
           <a:p>
             <a:r>
-              <a:rPr lang="en-US" smtClean="0"/>
+              <a:rPr lang="en-US"/>
               <a:t>Click to edit Master title style</a:t>
             </a:r>
-            <a:endParaRPr lang="en-US"/>
           </a:p>
         </p:txBody>
       </p:sp>
@@ -272,10 +287,9 @@
           </a:lstStyle>
           <a:p>
             <a:r>
-              <a:rPr lang="en-US" smtClean="0"/>
+              <a:rPr lang="en-US"/>
               <a:t>Click to edit Master subtitle style</a:t>
             </a:r>
-            <a:endParaRPr lang="en-US"/>
           </a:p>
         </p:txBody>
       </p:sp>
@@ -296,7 +310,7 @@
           <a:p>
             <a:fld id="{5BCAD085-E8A6-8845-BD4E-CB4CCA059FC4}" type="datetimeFigureOut">
               <a:rPr lang="en-US" smtClean="0"/>
-              <a:t>1/27/13</a:t>
+              <a:t>5/24/2026</a:t>
             </a:fld>
             <a:endParaRPr lang="en-US"/>
           </a:p>
@@ -390,10 +404,9 @@
           <a:lstStyle/>
           <a:p>
             <a:r>
-              <a:rPr lang="en-US" smtClean="0"/>
+              <a:rPr lang="en-US"/>
               <a:t>Click to edit Master title style</a:t>
             </a:r>
-            <a:endParaRPr lang="en-US"/>
           </a:p>
         </p:txBody>
       </p:sp>
@@ -414,38 +427,37 @@
           <a:p>
             <a:pPr lvl="0"/>
             <a:r>
-              <a:rPr lang="en-US" smtClean="0"/>
+              <a:rPr lang="en-US"/>
               <a:t>Click to edit Master text styles</a:t>
             </a:r>
           </a:p>
           <a:p>
             <a:pPr lvl="1"/>
             <a:r>
-              <a:rPr lang="en-US" smtClean="0"/>
+              <a:rPr lang="en-US"/>
               <a:t>Second level</a:t>
             </a:r>
           </a:p>
           <a:p>
             <a:pPr lvl="2"/>
             <a:r>
-              <a:rPr lang="en-US" smtClean="0"/>
+              <a:rPr lang="en-US"/>
               <a:t>Third level</a:t>
             </a:r>
           </a:p>
           <a:p>
             <a:pPr lvl="3"/>
             <a:r>
-              <a:rPr lang="en-US" smtClean="0"/>
+              <a:rPr lang="en-US"/>
               <a:t>Fourth level</a:t>
             </a:r>
           </a:p>
           <a:p>
             <a:pPr lvl="4"/>
             <a:r>
-              <a:rPr lang="en-US" smtClean="0"/>
+              <a:rPr lang="en-US"/>
               <a:t>Fifth level</a:t>
             </a:r>
-            <a:endParaRPr lang="en-US"/>
           </a:p>
         </p:txBody>
       </p:sp>
@@ -466,7 +478,7 @@
           <a:p>
             <a:fld id="{5BCAD085-E8A6-8845-BD4E-CB4CCA059FC4}" type="datetimeFigureOut">
               <a:rPr lang="en-US" smtClean="0"/>
-              <a:t>1/27/13</a:t>
+              <a:t>5/24/2026</a:t>
             </a:fld>
             <a:endParaRPr lang="en-US"/>
           </a:p>
@@ -565,10 +577,9 @@
           <a:lstStyle/>
           <a:p>
             <a:r>
-              <a:rPr lang="en-US" smtClean="0"/>
+              <a:rPr lang="en-US"/>
               <a:t>Click to edit Master title style</a:t>
             </a:r>
-            <a:endParaRPr lang="en-US"/>
           </a:p>
         </p:txBody>
       </p:sp>
@@ -594,38 +605,37 @@
           <a:p>
             <a:pPr lvl="0"/>
             <a:r>
-              <a:rPr lang="en-US" smtClean="0"/>
+              <a:rPr lang="en-US"/>
               <a:t>Click to edit Master text styles</a:t>
             </a:r>
           </a:p>
           <a:p>
             <a:pPr lvl="1"/>
             <a:r>
-              <a:rPr lang="en-US" smtClean="0"/>
+              <a:rPr lang="en-US"/>
               <a:t>Second level</a:t>
             </a:r>
           </a:p>
           <a:p>
             <a:pPr lvl="2"/>
             <a:r>
-              <a:rPr lang="en-US" smtClean="0"/>
+              <a:rPr lang="en-US"/>
               <a:t>Third level</a:t>
             </a:r>
           </a:p>
           <a:p>
             <a:pPr lvl="3"/>
             <a:r>
-              <a:rPr lang="en-US" smtClean="0"/>
+              <a:rPr lang="en-US"/>
               <a:t>Fourth level</a:t>
             </a:r>
           </a:p>
           <a:p>
             <a:pPr lvl="4"/>
             <a:r>
-              <a:rPr lang="en-US" smtClean="0"/>
+              <a:rPr lang="en-US"/>
               <a:t>Fifth level</a:t>
             </a:r>
-            <a:endParaRPr lang="en-US"/>
           </a:p>
         </p:txBody>
       </p:sp>
@@ -646,7 +656,7 @@
           <a:p>
             <a:fld id="{5BCAD085-E8A6-8845-BD4E-CB4CCA059FC4}" type="datetimeFigureOut">
               <a:rPr lang="en-US" smtClean="0"/>
-              <a:t>1/27/13</a:t>
+              <a:t>5/24/2026</a:t>
             </a:fld>
             <a:endParaRPr lang="en-US"/>
           </a:p>
@@ -740,10 +750,9 @@
           <a:lstStyle/>
           <a:p>
             <a:r>
-              <a:rPr lang="en-US" smtClean="0"/>
+              <a:rPr lang="en-US"/>
               <a:t>Click to edit Master title style</a:t>
             </a:r>
-            <a:endParaRPr lang="en-US"/>
           </a:p>
         </p:txBody>
       </p:sp>
@@ -764,38 +773,37 @@
           <a:p>
             <a:pPr lvl="0"/>
             <a:r>
-              <a:rPr lang="en-US" smtClean="0"/>
+              <a:rPr lang="en-US"/>
               <a:t>Click to edit Master text styles</a:t>
             </a:r>
           </a:p>
           <a:p>
             <a:pPr lvl="1"/>
             <a:r>
-              <a:rPr lang="en-US" smtClean="0"/>
+              <a:rPr lang="en-US"/>
               <a:t>Second level</a:t>
             </a:r>
           </a:p>
           <a:p>
             <a:pPr lvl="2"/>
             <a:r>
-              <a:rPr lang="en-US" smtClean="0"/>
+              <a:rPr lang="en-US"/>
               <a:t>Third level</a:t>
             </a:r>
           </a:p>
           <a:p>
             <a:pPr lvl="3"/>
             <a:r>
-              <a:rPr lang="en-US" smtClean="0"/>
+              <a:rPr lang="en-US"/>
               <a:t>Fourth level</a:t>
             </a:r>
           </a:p>
           <a:p>
             <a:pPr lvl="4"/>
             <a:r>
-              <a:rPr lang="en-US" smtClean="0"/>
+              <a:rPr lang="en-US"/>
               <a:t>Fifth level</a:t>
             </a:r>
-            <a:endParaRPr lang="en-US"/>
           </a:p>
         </p:txBody>
       </p:sp>
@@ -816,7 +824,7 @@
           <a:p>
             <a:fld id="{5BCAD085-E8A6-8845-BD4E-CB4CCA059FC4}" type="datetimeFigureOut">
               <a:rPr lang="en-US" smtClean="0"/>
-              <a:t>1/27/13</a:t>
+              <a:t>5/24/2026</a:t>
             </a:fld>
             <a:endParaRPr lang="en-US"/>
           </a:p>
@@ -919,10 +927,9 @@
           </a:lstStyle>
           <a:p>
             <a:r>
-              <a:rPr lang="en-US" smtClean="0"/>
+              <a:rPr lang="en-US"/>
               <a:t>Click to edit Master title style</a:t>
             </a:r>
-            <a:endParaRPr lang="en-US"/>
           </a:p>
         </p:txBody>
       </p:sp>
@@ -1039,7 +1046,7 @@
           <a:p>
             <a:pPr lvl="0"/>
             <a:r>
-              <a:rPr lang="en-US" smtClean="0"/>
+              <a:rPr lang="en-US"/>
               <a:t>Click to edit Master text styles</a:t>
             </a:r>
           </a:p>
@@ -1062,7 +1069,7 @@
           <a:p>
             <a:fld id="{5BCAD085-E8A6-8845-BD4E-CB4CCA059FC4}" type="datetimeFigureOut">
               <a:rPr lang="en-US" smtClean="0"/>
-              <a:t>1/27/13</a:t>
+              <a:t>5/24/2026</a:t>
             </a:fld>
             <a:endParaRPr lang="en-US"/>
           </a:p>
@@ -1156,10 +1163,9 @@
           <a:lstStyle/>
           <a:p>
             <a:r>
-              <a:rPr lang="en-US" smtClean="0"/>
+              <a:rPr lang="en-US"/>
               <a:t>Click to edit Master title style</a:t>
             </a:r>
-            <a:endParaRPr lang="en-US"/>
           </a:p>
         </p:txBody>
       </p:sp>
@@ -1213,38 +1219,37 @@
           <a:p>
             <a:pPr lvl="0"/>
             <a:r>
-              <a:rPr lang="en-US" smtClean="0"/>
+              <a:rPr lang="en-US"/>
               <a:t>Click to edit Master text styles</a:t>
             </a:r>
           </a:p>
           <a:p>
             <a:pPr lvl="1"/>
             <a:r>
-              <a:rPr lang="en-US" smtClean="0"/>
+              <a:rPr lang="en-US"/>
               <a:t>Second level</a:t>
             </a:r>
           </a:p>
           <a:p>
             <a:pPr lvl="2"/>
             <a:r>
-              <a:rPr lang="en-US" smtClean="0"/>
+              <a:rPr lang="en-US"/>
               <a:t>Third level</a:t>
             </a:r>
           </a:p>
           <a:p>
             <a:pPr lvl="3"/>
             <a:r>
-              <a:rPr lang="en-US" smtClean="0"/>
+              <a:rPr lang="en-US"/>
               <a:t>Fourth level</a:t>
             </a:r>
           </a:p>
           <a:p>
             <a:pPr lvl="4"/>
             <a:r>
-              <a:rPr lang="en-US" smtClean="0"/>
+              <a:rPr lang="en-US"/>
               <a:t>Fifth level</a:t>
             </a:r>
-            <a:endParaRPr lang="en-US"/>
           </a:p>
         </p:txBody>
       </p:sp>
@@ -1298,38 +1303,37 @@
           <a:p>
             <a:pPr lvl="0"/>
             <a:r>
-              <a:rPr lang="en-US" smtClean="0"/>
+              <a:rPr lang="en-US"/>
               <a:t>Click to edit Master text styles</a:t>
             </a:r>
           </a:p>
           <a:p>
             <a:pPr lvl="1"/>
             <a:r>
-              <a:rPr lang="en-US" smtClean="0"/>
+              <a:rPr lang="en-US"/>
               <a:t>Second level</a:t>
             </a:r>
           </a:p>
           <a:p>
             <a:pPr lvl="2"/>
             <a:r>
-              <a:rPr lang="en-US" smtClean="0"/>
+              <a:rPr lang="en-US"/>
               <a:t>Third level</a:t>
             </a:r>
           </a:p>
           <a:p>
             <a:pPr lvl="3"/>
             <a:r>
-              <a:rPr lang="en-US" smtClean="0"/>
+              <a:rPr lang="en-US"/>
               <a:t>Fourth level</a:t>
             </a:r>
           </a:p>
           <a:p>
             <a:pPr lvl="4"/>
             <a:r>
-              <a:rPr lang="en-US" smtClean="0"/>
+              <a:rPr lang="en-US"/>
               <a:t>Fifth level</a:t>
             </a:r>
-            <a:endParaRPr lang="en-US"/>
           </a:p>
         </p:txBody>
       </p:sp>
@@ -1350,7 +1354,7 @@
           <a:p>
             <a:fld id="{5BCAD085-E8A6-8845-BD4E-CB4CCA059FC4}" type="datetimeFigureOut">
               <a:rPr lang="en-US" smtClean="0"/>
-              <a:t>1/27/13</a:t>
+              <a:t>5/24/2026</a:t>
             </a:fld>
             <a:endParaRPr lang="en-US"/>
           </a:p>
@@ -1448,10 +1452,9 @@
           </a:lstStyle>
           <a:p>
             <a:r>
-              <a:rPr lang="en-US" smtClean="0"/>
+              <a:rPr lang="en-US"/>
               <a:t>Click to edit Master title style</a:t>
             </a:r>
-            <a:endParaRPr lang="en-US"/>
           </a:p>
         </p:txBody>
       </p:sp>
@@ -1514,7 +1517,7 @@
           <a:p>
             <a:pPr lvl="0"/>
             <a:r>
-              <a:rPr lang="en-US" smtClean="0"/>
+              <a:rPr lang="en-US"/>
               <a:t>Click to edit Master text styles</a:t>
             </a:r>
           </a:p>
@@ -1570,38 +1573,37 @@
           <a:p>
             <a:pPr lvl="0"/>
             <a:r>
-              <a:rPr lang="en-US" smtClean="0"/>
+              <a:rPr lang="en-US"/>
               <a:t>Click to edit Master text styles</a:t>
             </a:r>
           </a:p>
           <a:p>
             <a:pPr lvl="1"/>
             <a:r>
-              <a:rPr lang="en-US" smtClean="0"/>
+              <a:rPr lang="en-US"/>
               <a:t>Second level</a:t>
             </a:r>
           </a:p>
           <a:p>
             <a:pPr lvl="2"/>
             <a:r>
-              <a:rPr lang="en-US" smtClean="0"/>
+              <a:rPr lang="en-US"/>
               <a:t>Third level</a:t>
             </a:r>
           </a:p>
           <a:p>
             <a:pPr lvl="3"/>
             <a:r>
-              <a:rPr lang="en-US" smtClean="0"/>
+              <a:rPr lang="en-US"/>
               <a:t>Fourth level</a:t>
             </a:r>
           </a:p>
           <a:p>
             <a:pPr lvl="4"/>
             <a:r>
-              <a:rPr lang="en-US" smtClean="0"/>
+              <a:rPr lang="en-US"/>
               <a:t>Fifth level</a:t>
             </a:r>
-            <a:endParaRPr lang="en-US"/>
           </a:p>
         </p:txBody>
       </p:sp>
@@ -1664,7 +1666,7 @@
           <a:p>
             <a:pPr lvl="0"/>
             <a:r>
-              <a:rPr lang="en-US" smtClean="0"/>
+              <a:rPr lang="en-US"/>
               <a:t>Click to edit Master text styles</a:t>
             </a:r>
           </a:p>
@@ -1720,38 +1722,37 @@
           <a:p>
             <a:pPr lvl="0"/>
             <a:r>
-              <a:rPr lang="en-US" smtClean="0"/>
+              <a:rPr lang="en-US"/>
               <a:t>Click to edit Master text styles</a:t>
             </a:r>
           </a:p>
           <a:p>
             <a:pPr lvl="1"/>
             <a:r>
-              <a:rPr lang="en-US" smtClean="0"/>
+              <a:rPr lang="en-US"/>
               <a:t>Second level</a:t>
             </a:r>
           </a:p>
           <a:p>
             <a:pPr lvl="2"/>
             <a:r>
-              <a:rPr lang="en-US" smtClean="0"/>
+              <a:rPr lang="en-US"/>
               <a:t>Third level</a:t>
             </a:r>
           </a:p>
           <a:p>
             <a:pPr lvl="3"/>
             <a:r>
-              <a:rPr lang="en-US" smtClean="0"/>
+              <a:rPr lang="en-US"/>
               <a:t>Fourth level</a:t>
             </a:r>
           </a:p>
           <a:p>
             <a:pPr lvl="4"/>
             <a:r>
-              <a:rPr lang="en-US" smtClean="0"/>
+              <a:rPr lang="en-US"/>
               <a:t>Fifth level</a:t>
             </a:r>
-            <a:endParaRPr lang="en-US"/>
           </a:p>
         </p:txBody>
       </p:sp>
@@ -1772,7 +1773,7 @@
           <a:p>
             <a:fld id="{5BCAD085-E8A6-8845-BD4E-CB4CCA059FC4}" type="datetimeFigureOut">
               <a:rPr lang="en-US" smtClean="0"/>
-              <a:t>1/27/13</a:t>
+              <a:t>5/24/2026</a:t>
             </a:fld>
             <a:endParaRPr lang="en-US"/>
           </a:p>
@@ -1866,10 +1867,9 @@
           <a:lstStyle/>
           <a:p>
             <a:r>
-              <a:rPr lang="en-US" smtClean="0"/>
+              <a:rPr lang="en-US"/>
               <a:t>Click to edit Master title style</a:t>
             </a:r>
-            <a:endParaRPr lang="en-US"/>
           </a:p>
         </p:txBody>
       </p:sp>
@@ -1890,7 +1890,7 @@
           <a:p>
             <a:fld id="{5BCAD085-E8A6-8845-BD4E-CB4CCA059FC4}" type="datetimeFigureOut">
               <a:rPr lang="en-US" smtClean="0"/>
-              <a:t>1/27/13</a:t>
+              <a:t>5/24/2026</a:t>
             </a:fld>
             <a:endParaRPr lang="en-US"/>
           </a:p>
@@ -1985,7 +1985,7 @@
           <a:p>
             <a:fld id="{5BCAD085-E8A6-8845-BD4E-CB4CCA059FC4}" type="datetimeFigureOut">
               <a:rPr lang="en-US" smtClean="0"/>
-              <a:t>1/27/13</a:t>
+              <a:t>5/24/2026</a:t>
             </a:fld>
             <a:endParaRPr lang="en-US"/>
           </a:p>
@@ -2088,10 +2088,9 @@
           </a:lstStyle>
           <a:p>
             <a:r>
-              <a:rPr lang="en-US" smtClean="0"/>
+              <a:rPr lang="en-US"/>
               <a:t>Click to edit Master title style</a:t>
             </a:r>
-            <a:endParaRPr lang="en-US"/>
           </a:p>
         </p:txBody>
       </p:sp>
@@ -2145,38 +2144,37 @@
           <a:p>
             <a:pPr lvl="0"/>
             <a:r>
-              <a:rPr lang="en-US" smtClean="0"/>
+              <a:rPr lang="en-US"/>
               <a:t>Click to edit Master text styles</a:t>
             </a:r>
           </a:p>
           <a:p>
             <a:pPr lvl="1"/>
             <a:r>
-              <a:rPr lang="en-US" smtClean="0"/>
+              <a:rPr lang="en-US"/>
               <a:t>Second level</a:t>
             </a:r>
           </a:p>
           <a:p>
             <a:pPr lvl="2"/>
             <a:r>
-              <a:rPr lang="en-US" smtClean="0"/>
+              <a:rPr lang="en-US"/>
               <a:t>Third level</a:t>
             </a:r>
           </a:p>
           <a:p>
             <a:pPr lvl="3"/>
             <a:r>
-              <a:rPr lang="en-US" smtClean="0"/>
+              <a:rPr lang="en-US"/>
               <a:t>Fourth level</a:t>
             </a:r>
           </a:p>
           <a:p>
             <a:pPr lvl="4"/>
             <a:r>
-              <a:rPr lang="en-US" smtClean="0"/>
+              <a:rPr lang="en-US"/>
               <a:t>Fifth level</a:t>
             </a:r>
-            <a:endParaRPr lang="en-US"/>
           </a:p>
         </p:txBody>
       </p:sp>
@@ -2239,7 +2237,7 @@
           <a:p>
             <a:pPr lvl="0"/>
             <a:r>
-              <a:rPr lang="en-US" smtClean="0"/>
+              <a:rPr lang="en-US"/>
               <a:t>Click to edit Master text styles</a:t>
             </a:r>
           </a:p>
@@ -2262,7 +2260,7 @@
           <a:p>
             <a:fld id="{5BCAD085-E8A6-8845-BD4E-CB4CCA059FC4}" type="datetimeFigureOut">
               <a:rPr lang="en-US" smtClean="0"/>
-              <a:t>1/27/13</a:t>
+              <a:t>5/24/2026</a:t>
             </a:fld>
             <a:endParaRPr lang="en-US"/>
           </a:p>
@@ -2365,10 +2363,9 @@
           </a:lstStyle>
           <a:p>
             <a:r>
-              <a:rPr lang="en-US" smtClean="0"/>
+              <a:rPr lang="en-US"/>
               <a:t>Click to edit Master title style</a:t>
             </a:r>
-            <a:endParaRPr lang="en-US"/>
           </a:p>
         </p:txBody>
       </p:sp>
@@ -2492,7 +2489,7 @@
           <a:p>
             <a:pPr lvl="0"/>
             <a:r>
-              <a:rPr lang="en-US" smtClean="0"/>
+              <a:rPr lang="en-US"/>
               <a:t>Click to edit Master text styles</a:t>
             </a:r>
           </a:p>
@@ -2515,7 +2512,7 @@
           <a:p>
             <a:fld id="{5BCAD085-E8A6-8845-BD4E-CB4CCA059FC4}" type="datetimeFigureOut">
               <a:rPr lang="en-US" smtClean="0"/>
-              <a:t>1/27/13</a:t>
+              <a:t>5/24/2026</a:t>
             </a:fld>
             <a:endParaRPr lang="en-US"/>
           </a:p>
@@ -2624,10 +2621,9 @@
           <a:lstStyle/>
           <a:p>
             <a:r>
-              <a:rPr lang="en-US" smtClean="0"/>
+              <a:rPr lang="en-US"/>
               <a:t>Click to edit Master title style</a:t>
             </a:r>
-            <a:endParaRPr lang="en-US"/>
           </a:p>
         </p:txBody>
       </p:sp>
@@ -2658,38 +2654,37 @@
           <a:p>
             <a:pPr lvl="0"/>
             <a:r>
-              <a:rPr lang="en-US" smtClean="0"/>
+              <a:rPr lang="en-US"/>
               <a:t>Click to edit Master text styles</a:t>
             </a:r>
           </a:p>
           <a:p>
             <a:pPr lvl="1"/>
             <a:r>
-              <a:rPr lang="en-US" smtClean="0"/>
+              <a:rPr lang="en-US"/>
               <a:t>Second level</a:t>
             </a:r>
           </a:p>
           <a:p>
             <a:pPr lvl="2"/>
             <a:r>
-              <a:rPr lang="en-US" smtClean="0"/>
+              <a:rPr lang="en-US"/>
               <a:t>Third level</a:t>
             </a:r>
           </a:p>
           <a:p>
             <a:pPr lvl="3"/>
             <a:r>
-              <a:rPr lang="en-US" smtClean="0"/>
+              <a:rPr lang="en-US"/>
               <a:t>Fourth level</a:t>
             </a:r>
           </a:p>
           <a:p>
             <a:pPr lvl="4"/>
             <a:r>
-              <a:rPr lang="en-US" smtClean="0"/>
+              <a:rPr lang="en-US"/>
               <a:t>Fifth level</a:t>
             </a:r>
-            <a:endParaRPr lang="en-US"/>
           </a:p>
         </p:txBody>
       </p:sp>
@@ -2728,7 +2723,7 @@
           <a:p>
             <a:fld id="{5BCAD085-E8A6-8845-BD4E-CB4CCA059FC4}" type="datetimeFigureOut">
               <a:rPr lang="en-US" smtClean="0"/>
-              <a:t>1/27/13</a:t>
+              <a:t>5/24/2026</a:t>
             </a:fld>
             <a:endParaRPr lang="en-US"/>
           </a:p>
@@ -3087,7 +3082,7 @@
 </file>
 
 <file path=ppt/slides/slide1.xml><?xml version="1.0" encoding="utf-8"?>
-<p:sld xmlns:a="http://schemas.openxmlformats.org/drawingml/2006/main" xmlns:p="http://schemas.openxmlformats.org/presentationml/2006/main" xmlns:r="http://schemas.openxmlformats.org/officeDocument/2006/relationships">
+<p:sld xmlns:a="http://schemas.openxmlformats.org/drawingml/2006/main" xmlns:r="http://schemas.openxmlformats.org/officeDocument/2006/relationships" xmlns:p="http://schemas.openxmlformats.org/presentationml/2006/main">
   <p:cSld>
     <p:bg>
       <p:bgPr>
@@ -3103,7 +3098,14 @@
         <p:cNvGrpSpPr/>
         <p:nvPr/>
       </p:nvGrpSpPr>
-      <p:grpSpPr/>
+      <p:grpSpPr>
+        <a:xfrm>
+          <a:off x="0" y="0"/>
+          <a:ext cx="0" cy="0"/>
+          <a:chOff x="0" y="0"/>
+          <a:chExt cx="0" cy="0"/>
+        </a:xfrm>
+      </p:grpSpPr>
       <p:sp>
         <p:nvSpPr>
           <p:cNvPr id="2" name="Rectangle 1"/>
@@ -3144,6 +3146,7 @@
           <a:lstStyle/>
           <a:p>
             <a:pPr algn="ctr"/>
+            <a:endParaRPr/>
           </a:p>
         </p:txBody>
       </p:sp>
@@ -3230,7 +3233,7 @@
 </file>
 
 <file path=ppt/slides/slide2.xml><?xml version="1.0" encoding="utf-8"?>
-<p:sld xmlns:a="http://schemas.openxmlformats.org/drawingml/2006/main" xmlns:p="http://schemas.openxmlformats.org/presentationml/2006/main" xmlns:r="http://schemas.openxmlformats.org/officeDocument/2006/relationships">
+<p:sld xmlns:a="http://schemas.openxmlformats.org/drawingml/2006/main" xmlns:r="http://schemas.openxmlformats.org/officeDocument/2006/relationships" xmlns:p="http://schemas.openxmlformats.org/presentationml/2006/main">
   <p:cSld>
     <p:spTree>
       <p:nvGrpSpPr>
@@ -3238,7 +3241,14 @@
         <p:cNvGrpSpPr/>
         <p:nvPr/>
       </p:nvGrpSpPr>
-      <p:grpSpPr/>
+      <p:grpSpPr>
+        <a:xfrm>
+          <a:off x="0" y="0"/>
+          <a:ext cx="0" cy="0"/>
+          <a:chOff x="0" y="0"/>
+          <a:chExt cx="0" cy="0"/>
+        </a:xfrm>
+      </p:grpSpPr>
       <p:sp>
         <p:nvSpPr>
           <p:cNvPr id="2" name="Rectangle 1"/>
@@ -3275,7 +3285,7 @@
           </a:fontRef>
         </p:style>
         <p:txBody>
-          <a:bodyPr rtlCol="0" anchor="ctr" wrap="square" lIns="731520" tIns="137160"/>
+          <a:bodyPr wrap="square" lIns="731520" tIns="137160" rtlCol="0" anchor="ctr"/>
           <a:lstStyle/>
           <a:p>
             <a:pPr algn="l">
@@ -3383,7 +3393,7 @@
 </file>
 
 <file path=ppt/slides/slide3.xml><?xml version="1.0" encoding="utf-8"?>
-<p:sld xmlns:a="http://schemas.openxmlformats.org/drawingml/2006/main" xmlns:p="http://schemas.openxmlformats.org/presentationml/2006/main" xmlns:r="http://schemas.openxmlformats.org/officeDocument/2006/relationships">
+<p:sld xmlns:a="http://schemas.openxmlformats.org/drawingml/2006/main" xmlns:r="http://schemas.openxmlformats.org/officeDocument/2006/relationships" xmlns:p="http://schemas.openxmlformats.org/presentationml/2006/main">
   <p:cSld>
     <p:spTree>
       <p:nvGrpSpPr>
@@ -3391,7 +3401,14 @@
         <p:cNvGrpSpPr/>
         <p:nvPr/>
       </p:nvGrpSpPr>
-      <p:grpSpPr/>
+      <p:grpSpPr>
+        <a:xfrm>
+          <a:off x="0" y="0"/>
+          <a:ext cx="0" cy="0"/>
+          <a:chOff x="0" y="0"/>
+          <a:chExt cx="0" cy="0"/>
+        </a:xfrm>
+      </p:grpSpPr>
       <p:sp>
         <p:nvSpPr>
           <p:cNvPr id="2" name="Rectangle 1"/>
@@ -3428,7 +3445,7 @@
           </a:fontRef>
         </p:style>
         <p:txBody>
-          <a:bodyPr rtlCol="0" anchor="ctr" wrap="square" lIns="731520" tIns="137160"/>
+          <a:bodyPr wrap="square" lIns="731520" tIns="137160" rtlCol="0" anchor="ctr"/>
           <a:lstStyle/>
           <a:p>
             <a:pPr algn="l">
@@ -3551,7 +3568,7 @@
 </file>
 
 <file path=ppt/slides/slide4.xml><?xml version="1.0" encoding="utf-8"?>
-<p:sld xmlns:a="http://schemas.openxmlformats.org/drawingml/2006/main" xmlns:p="http://schemas.openxmlformats.org/presentationml/2006/main" xmlns:r="http://schemas.openxmlformats.org/officeDocument/2006/relationships">
+<p:sld xmlns:a="http://schemas.openxmlformats.org/drawingml/2006/main" xmlns:r="http://schemas.openxmlformats.org/officeDocument/2006/relationships" xmlns:p="http://schemas.openxmlformats.org/presentationml/2006/main">
   <p:cSld>
     <p:spTree>
       <p:nvGrpSpPr>
@@ -3559,7 +3576,14 @@
         <p:cNvGrpSpPr/>
         <p:nvPr/>
       </p:nvGrpSpPr>
-      <p:grpSpPr/>
+      <p:grpSpPr>
+        <a:xfrm>
+          <a:off x="0" y="0"/>
+          <a:ext cx="0" cy="0"/>
+          <a:chOff x="0" y="0"/>
+          <a:chExt cx="0" cy="0"/>
+        </a:xfrm>
+      </p:grpSpPr>
       <p:sp>
         <p:nvSpPr>
           <p:cNvPr id="2" name="Rectangle 1"/>
@@ -3596,7 +3620,7 @@
           </a:fontRef>
         </p:style>
         <p:txBody>
-          <a:bodyPr rtlCol="0" anchor="ctr" wrap="square" lIns="731520" tIns="137160"/>
+          <a:bodyPr wrap="square" lIns="731520" tIns="137160" rtlCol="0" anchor="ctr"/>
           <a:lstStyle/>
           <a:p>
             <a:pPr algn="l">
@@ -3719,7 +3743,7 @@
 </file>
 
 <file path=ppt/slides/slide5.xml><?xml version="1.0" encoding="utf-8"?>
-<p:sld xmlns:a="http://schemas.openxmlformats.org/drawingml/2006/main" xmlns:p="http://schemas.openxmlformats.org/presentationml/2006/main" xmlns:r="http://schemas.openxmlformats.org/officeDocument/2006/relationships">
+<p:sld xmlns:a="http://schemas.openxmlformats.org/drawingml/2006/main" xmlns:r="http://schemas.openxmlformats.org/officeDocument/2006/relationships" xmlns:p="http://schemas.openxmlformats.org/presentationml/2006/main">
   <p:cSld>
     <p:spTree>
       <p:nvGrpSpPr>
@@ -3727,7 +3751,299 @@
         <p:cNvGrpSpPr/>
         <p:nvPr/>
       </p:nvGrpSpPr>
-      <p:grpSpPr/>
+      <p:grpSpPr>
+        <a:xfrm>
+          <a:off x="0" y="0"/>
+          <a:ext cx="0" cy="0"/>
+          <a:chOff x="0" y="0"/>
+          <a:chExt cx="0" cy="0"/>
+        </a:xfrm>
+      </p:grpSpPr>
+      <p:sp>
+        <p:nvSpPr>
+          <p:cNvPr id="2" name="Rectangle 1"/>
+          <p:cNvSpPr/>
+          <p:nvPr/>
+        </p:nvSpPr>
+        <p:spPr>
+          <a:xfrm>
+            <a:off x="-1" y="-182880"/>
+            <a:ext cx="12191695" cy="1097280"/>
+          </a:xfrm>
+          <a:prstGeom prst="rect">
+            <a:avLst/>
+          </a:prstGeom>
+          <a:solidFill>
+            <a:srgbClr val="003366"/>
+          </a:solidFill>
+          <a:ln>
+            <a:noFill/>
+          </a:ln>
+        </p:spPr>
+        <p:style>
+          <a:lnRef idx="1">
+            <a:schemeClr val="accent1"/>
+          </a:lnRef>
+          <a:fillRef idx="3">
+            <a:schemeClr val="accent1"/>
+          </a:fillRef>
+          <a:effectRef idx="2">
+            <a:schemeClr val="accent1"/>
+          </a:effectRef>
+          <a:fontRef idx="minor">
+            <a:schemeClr val="lt1"/>
+          </a:fontRef>
+        </p:style>
+        <p:txBody>
+          <a:bodyPr wrap="square" lIns="731520" tIns="137160" rtlCol="0" anchor="ctr"/>
+          <a:lstStyle/>
+          <a:p>
+            <a:pPr algn="l">
+              <a:defRPr sz="3200" b="1">
+                <a:solidFill>
+                  <a:srgbClr val="FFFFFF"/>
+                </a:solidFill>
+              </a:defRPr>
+            </a:pPr>
+            <a:r>
+              <a:rPr dirty="0" err="1"/>
+              <a:t>功能演示（截图</a:t>
+            </a:r>
+            <a:r>
+              <a:rPr dirty="0"/>
+              <a:t>）</a:t>
+            </a:r>
+          </a:p>
+        </p:txBody>
+      </p:sp>
+      <p:sp>
+        <p:nvSpPr>
+          <p:cNvPr id="3" name="TextBox 2"/>
+          <p:cNvSpPr txBox="1"/>
+          <p:nvPr/>
+        </p:nvSpPr>
+        <p:spPr>
+          <a:xfrm>
+            <a:off x="731520" y="1371600"/>
+            <a:ext cx="10515600" cy="5029200"/>
+          </a:xfrm>
+          <a:prstGeom prst="rect">
+            <a:avLst/>
+          </a:prstGeom>
+          <a:noFill/>
+        </p:spPr>
+        <p:txBody>
+          <a:bodyPr wrap="square">
+            <a:spAutoFit/>
+          </a:bodyPr>
+          <a:lstStyle/>
+          <a:p>
+            <a:pPr algn="l">
+              <a:spcAft>
+                <a:spcPts val="1000"/>
+              </a:spcAft>
+              <a:defRPr sz="1800">
+                <a:solidFill>
+                  <a:srgbClr val="333333"/>
+                </a:solidFill>
+              </a:defRPr>
+            </a:pPr>
+            <a:r>
+              <a:t>（此处插入登录页截图）</a:t>
+            </a:r>
+          </a:p>
+          <a:p>
+            <a:pPr algn="l">
+              <a:spcAft>
+                <a:spcPts val="1000"/>
+              </a:spcAft>
+              <a:defRPr sz="1800">
+                <a:solidFill>
+                  <a:srgbClr val="333333"/>
+                </a:solidFill>
+              </a:defRPr>
+            </a:pPr>
+            <a:r>
+              <a:t>（此处插入学生端截图 — 选课、评价、历史）</a:t>
+            </a:r>
+          </a:p>
+          <a:p>
+            <a:pPr algn="l">
+              <a:spcAft>
+                <a:spcPts val="1000"/>
+              </a:spcAft>
+              <a:defRPr sz="1800">
+                <a:solidFill>
+                  <a:srgbClr val="333333"/>
+                </a:solidFill>
+              </a:defRPr>
+            </a:pPr>
+            <a:r>
+              <a:t>（此处插入教师端截图 — 评分统计、评价列表、CSV导出）</a:t>
+            </a:r>
+          </a:p>
+          <a:p>
+            <a:pPr algn="l">
+              <a:spcAft>
+                <a:spcPts val="1000"/>
+              </a:spcAft>
+              <a:defRPr sz="1800">
+                <a:solidFill>
+                  <a:srgbClr val="333333"/>
+                </a:solidFill>
+              </a:defRPr>
+            </a:pPr>
+            <a:r>
+              <a:t>（此处插入管理员端截图 — 课程管理、用户管理、数据仪表板）</a:t>
+            </a:r>
+          </a:p>
+        </p:txBody>
+      </p:sp>
+      <p:pic>
+        <p:nvPicPr>
+          <p:cNvPr id="5" name="图片 4">
+            <a:extLst>
+              <a:ext uri="{FF2B5EF4-FFF2-40B4-BE49-F238E27FC236}">
+                <a16:creationId xmlns:a16="http://schemas.microsoft.com/office/drawing/2014/main" id="{A2AB9049-18F7-9C03-FC4F-B5E978172151}"/>
+              </a:ext>
+            </a:extLst>
+          </p:cNvPr>
+          <p:cNvPicPr>
+            <a:picLocks noChangeAspect="1"/>
+          </p:cNvPicPr>
+          <p:nvPr/>
+        </p:nvPicPr>
+        <p:blipFill>
+          <a:blip r:embed="rId2"/>
+          <a:stretch>
+            <a:fillRect/>
+          </a:stretch>
+        </p:blipFill>
+        <p:spPr>
+          <a:xfrm>
+            <a:off x="0" y="781769"/>
+            <a:ext cx="4860985" cy="3038115"/>
+          </a:xfrm>
+          <a:prstGeom prst="rect">
+            <a:avLst/>
+          </a:prstGeom>
+        </p:spPr>
+      </p:pic>
+      <p:pic>
+        <p:nvPicPr>
+          <p:cNvPr id="7" name="图片 6">
+            <a:extLst>
+              <a:ext uri="{FF2B5EF4-FFF2-40B4-BE49-F238E27FC236}">
+                <a16:creationId xmlns:a16="http://schemas.microsoft.com/office/drawing/2014/main" id="{806C130A-22C6-588F-3D8F-5A84D5A91E35}"/>
+              </a:ext>
+            </a:extLst>
+          </p:cNvPr>
+          <p:cNvPicPr>
+            <a:picLocks noChangeAspect="1"/>
+          </p:cNvPicPr>
+          <p:nvPr/>
+        </p:nvPicPr>
+        <p:blipFill>
+          <a:blip r:embed="rId3"/>
+          <a:stretch>
+            <a:fillRect/>
+          </a:stretch>
+        </p:blipFill>
+        <p:spPr>
+          <a:xfrm>
+            <a:off x="-1" y="3819884"/>
+            <a:ext cx="4860986" cy="3038116"/>
+          </a:xfrm>
+          <a:prstGeom prst="rect">
+            <a:avLst/>
+          </a:prstGeom>
+        </p:spPr>
+      </p:pic>
+      <p:pic>
+        <p:nvPicPr>
+          <p:cNvPr id="9" name="图片 8">
+            <a:extLst>
+              <a:ext uri="{FF2B5EF4-FFF2-40B4-BE49-F238E27FC236}">
+                <a16:creationId xmlns:a16="http://schemas.microsoft.com/office/drawing/2014/main" id="{69A7D796-B6B9-5570-E340-377EA09DB43C}"/>
+              </a:ext>
+            </a:extLst>
+          </p:cNvPr>
+          <p:cNvPicPr>
+            <a:picLocks noChangeAspect="1"/>
+          </p:cNvPicPr>
+          <p:nvPr/>
+        </p:nvPicPr>
+        <p:blipFill>
+          <a:blip r:embed="rId4"/>
+          <a:stretch>
+            <a:fillRect/>
+          </a:stretch>
+        </p:blipFill>
+        <p:spPr>
+          <a:xfrm>
+            <a:off x="4860985" y="333684"/>
+            <a:ext cx="5346358" cy="3341473"/>
+          </a:xfrm>
+          <a:prstGeom prst="rect">
+            <a:avLst/>
+          </a:prstGeom>
+        </p:spPr>
+      </p:pic>
+      <p:pic>
+        <p:nvPicPr>
+          <p:cNvPr id="11" name="图片 10">
+            <a:extLst>
+              <a:ext uri="{FF2B5EF4-FFF2-40B4-BE49-F238E27FC236}">
+                <a16:creationId xmlns:a16="http://schemas.microsoft.com/office/drawing/2014/main" id="{6313D92F-9409-EFD7-18AF-2C93CE6422F6}"/>
+              </a:ext>
+            </a:extLst>
+          </p:cNvPr>
+          <p:cNvPicPr>
+            <a:picLocks noChangeAspect="1"/>
+          </p:cNvPicPr>
+          <p:nvPr/>
+        </p:nvPicPr>
+        <p:blipFill>
+          <a:blip r:embed="rId5"/>
+          <a:stretch>
+            <a:fillRect/>
+          </a:stretch>
+        </p:blipFill>
+        <p:spPr>
+          <a:xfrm>
+            <a:off x="4860985" y="3675157"/>
+            <a:ext cx="5077967" cy="3173729"/>
+          </a:xfrm>
+          <a:prstGeom prst="rect">
+            <a:avLst/>
+          </a:prstGeom>
+        </p:spPr>
+      </p:pic>
+    </p:spTree>
+  </p:cSld>
+  <p:clrMapOvr>
+    <a:masterClrMapping/>
+  </p:clrMapOvr>
+</p:sld>
+</file>
+
+<file path=ppt/slides/slide6.xml><?xml version="1.0" encoding="utf-8"?>
+<p:sld xmlns:a="http://schemas.openxmlformats.org/drawingml/2006/main" xmlns:r="http://schemas.openxmlformats.org/officeDocument/2006/relationships" xmlns:p="http://schemas.openxmlformats.org/presentationml/2006/main">
+  <p:cSld>
+    <p:spTree>
+      <p:nvGrpSpPr>
+        <p:cNvPr id="1" name=""/>
+        <p:cNvGrpSpPr/>
+        <p:nvPr/>
+      </p:nvGrpSpPr>
+      <p:grpSpPr>
+        <a:xfrm>
+          <a:off x="0" y="0"/>
+          <a:ext cx="0" cy="0"/>
+          <a:chOff x="0" y="0"/>
+          <a:chExt cx="0" cy="0"/>
+        </a:xfrm>
+      </p:grpSpPr>
       <p:sp>
         <p:nvSpPr>
           <p:cNvPr id="2" name="Rectangle 1"/>
@@ -3764,7 +4080,7 @@
           </a:fontRef>
         </p:style>
         <p:txBody>
-          <a:bodyPr rtlCol="0" anchor="ctr" wrap="square" lIns="731520" tIns="137160"/>
+          <a:bodyPr wrap="square" lIns="731520" tIns="137160" rtlCol="0" anchor="ctr"/>
           <a:lstStyle/>
           <a:p>
             <a:pPr algn="l">
@@ -3775,7 +4091,7 @@
               </a:defRPr>
             </a:pPr>
             <a:r>
-              <a:t>功能演示（截图）</a:t>
+              <a:t>数据可视化（ECharts）</a:t>
             </a:r>
           </a:p>
         </p:txBody>
@@ -3813,7 +4129,7 @@
               </a:defRPr>
             </a:pPr>
             <a:r>
-              <a:t>（此处插入登录页截图）</a:t>
+              <a:t>● 课程平均评分排名柱状图 — 直观比较各课程评价水平</a:t>
             </a:r>
           </a:p>
           <a:p>
@@ -3828,7 +4144,7 @@
               </a:defRPr>
             </a:pPr>
             <a:r>
-              <a:t>（此处插入学生端截图 — 选课、评价、历史）</a:t>
+              <a:t>● 评分分布饼图 — 展示1-5星评价的数量和占比</a:t>
             </a:r>
           </a:p>
           <a:p>
@@ -3843,7 +4159,7 @@
               </a:defRPr>
             </a:pPr>
             <a:r>
-              <a:t>（此处插入教师端截图 — 评分统计、评价列表、CSV导出）</a:t>
+              <a:t>● 选课人数对比图 — 各课程热度一目了然</a:t>
             </a:r>
           </a:p>
           <a:p>
@@ -3858,11 +4174,56 @@
               </a:defRPr>
             </a:pPr>
             <a:r>
-              <a:t>（此处插入管理员端截图 — 课程管理、用户管理、数据仪表板）</a:t>
-            </a:r>
-          </a:p>
-        </p:txBody>
-      </p:sp>
+              <a:t>● 所有图表支持交互式tooltip悬停查看详情</a:t>
+            </a:r>
+          </a:p>
+          <a:p>
+            <a:pPr algn="l">
+              <a:spcAft>
+                <a:spcPts val="1000"/>
+              </a:spcAft>
+              <a:defRPr sz="1800">
+                <a:solidFill>
+                  <a:srgbClr val="333333"/>
+                </a:solidFill>
+              </a:defRPr>
+            </a:pPr>
+            <a:r>
+              <a:t>（此处插入ECharts图表截图）</a:t>
+            </a:r>
+          </a:p>
+        </p:txBody>
+      </p:sp>
+      <p:pic>
+        <p:nvPicPr>
+          <p:cNvPr id="5" name="图片 4">
+            <a:extLst>
+              <a:ext uri="{FF2B5EF4-FFF2-40B4-BE49-F238E27FC236}">
+                <a16:creationId xmlns:a16="http://schemas.microsoft.com/office/drawing/2014/main" id="{4DF1613D-63B4-997B-0CCC-90CABDDF1944}"/>
+              </a:ext>
+            </a:extLst>
+          </p:cNvPr>
+          <p:cNvPicPr>
+            <a:picLocks noChangeAspect="1"/>
+          </p:cNvPicPr>
+          <p:nvPr/>
+        </p:nvPicPr>
+        <p:blipFill>
+          <a:blip r:embed="rId2"/>
+          <a:stretch>
+            <a:fillRect/>
+          </a:stretch>
+        </p:blipFill>
+        <p:spPr>
+          <a:xfrm>
+            <a:off x="5412260" y="2328837"/>
+            <a:ext cx="6515141" cy="4071963"/>
+          </a:xfrm>
+          <a:prstGeom prst="rect">
+            <a:avLst/>
+          </a:prstGeom>
+        </p:spPr>
+      </p:pic>
     </p:spTree>
   </p:cSld>
   <p:clrMapOvr>
@@ -3871,8 +4232,8 @@
 </p:sld>
 </file>
 
-<file path=ppt/slides/slide6.xml><?xml version="1.0" encoding="utf-8"?>
-<p:sld xmlns:a="http://schemas.openxmlformats.org/drawingml/2006/main" xmlns:p="http://schemas.openxmlformats.org/presentationml/2006/main" xmlns:r="http://schemas.openxmlformats.org/officeDocument/2006/relationships">
+<file path=ppt/slides/slide7.xml><?xml version="1.0" encoding="utf-8"?>
+<p:sld xmlns:a="http://schemas.openxmlformats.org/drawingml/2006/main" xmlns:r="http://schemas.openxmlformats.org/officeDocument/2006/relationships" xmlns:p="http://schemas.openxmlformats.org/presentationml/2006/main">
   <p:cSld>
     <p:spTree>
       <p:nvGrpSpPr>
@@ -3880,7 +4241,14 @@
         <p:cNvGrpSpPr/>
         <p:nvPr/>
       </p:nvGrpSpPr>
-      <p:grpSpPr/>
+      <p:grpSpPr>
+        <a:xfrm>
+          <a:off x="0" y="0"/>
+          <a:ext cx="0" cy="0"/>
+          <a:chOff x="0" y="0"/>
+          <a:chExt cx="0" cy="0"/>
+        </a:xfrm>
+      </p:grpSpPr>
       <p:sp>
         <p:nvSpPr>
           <p:cNvPr id="2" name="Rectangle 1"/>
@@ -3917,7 +4285,7 @@
           </a:fontRef>
         </p:style>
         <p:txBody>
-          <a:bodyPr rtlCol="0" anchor="ctr" wrap="square" lIns="731520" tIns="137160"/>
+          <a:bodyPr wrap="square" lIns="731520" tIns="137160" rtlCol="0" anchor="ctr"/>
           <a:lstStyle/>
           <a:p>
             <a:pPr algn="l">
@@ -3928,7 +4296,7 @@
               </a:defRPr>
             </a:pPr>
             <a:r>
-              <a:t>数据可视化（ECharts）</a:t>
+              <a:t>GitHub仓库与代码管理</a:t>
             </a:r>
           </a:p>
         </p:txBody>
@@ -3966,7 +4334,7 @@
               </a:defRPr>
             </a:pPr>
             <a:r>
-              <a:t>● 课程平均评分排名柱状图 — 直观比较各课程评价水平</a:t>
+              <a:t>● 仓库地址：https://github.com/cty23/project（公开）</a:t>
             </a:r>
           </a:p>
           <a:p>
@@ -3981,7 +4349,7 @@
               </a:defRPr>
             </a:pPr>
             <a:r>
-              <a:t>● 评分分布饼图 — 展示1-5星评价的数量和占比</a:t>
+              <a:t>● 完整项目结构：backend / frontend / database / README / requirements</a:t>
             </a:r>
           </a:p>
           <a:p>
@@ -3996,7 +4364,7 @@
               </a:defRPr>
             </a:pPr>
             <a:r>
-              <a:t>● 选课人数对比图 — 各课程热度一目了然</a:t>
+              <a:t>● 包含完整运行说明：环境要求、安装步骤、启动方法、测试账号</a:t>
             </a:r>
           </a:p>
           <a:p>
@@ -4011,7 +4379,7 @@
               </a:defRPr>
             </a:pPr>
             <a:r>
-              <a:t>● 所有图表支持交互式tooltip悬停查看详情</a:t>
+              <a:t>● 版本控制：Git + SSH密钥认证</a:t>
             </a:r>
           </a:p>
           <a:p>
@@ -4026,11 +4394,41 @@
               </a:defRPr>
             </a:pPr>
             <a:r>
-              <a:t>（此处插入ECharts图表截图）</a:t>
-            </a:r>
-          </a:p>
-        </p:txBody>
-      </p:sp>
+              <a:t>（此处插入GitHub仓库截图）</a:t>
+            </a:r>
+          </a:p>
+        </p:txBody>
+      </p:sp>
+      <p:pic>
+        <p:nvPicPr>
+          <p:cNvPr id="5" name="图片 4">
+            <a:extLst>
+              <a:ext uri="{FF2B5EF4-FFF2-40B4-BE49-F238E27FC236}">
+                <a16:creationId xmlns:a16="http://schemas.microsoft.com/office/drawing/2014/main" id="{D6851F14-1D71-821F-C582-886DE2875EF6}"/>
+              </a:ext>
+            </a:extLst>
+          </p:cNvPr>
+          <p:cNvPicPr>
+            <a:picLocks noChangeAspect="1"/>
+          </p:cNvPicPr>
+          <p:nvPr/>
+        </p:nvPicPr>
+        <p:blipFill>
+          <a:blip r:embed="rId2"/>
+          <a:stretch>
+            <a:fillRect/>
+          </a:stretch>
+        </p:blipFill>
+        <p:spPr>
+          <a:xfrm>
+            <a:off x="4110680" y="2537252"/>
+            <a:ext cx="6620589" cy="4137868"/>
+          </a:xfrm>
+          <a:prstGeom prst="rect">
+            <a:avLst/>
+          </a:prstGeom>
+        </p:spPr>
+      </p:pic>
     </p:spTree>
   </p:cSld>
   <p:clrMapOvr>
@@ -4039,8 +4437,8 @@
 </p:sld>
 </file>
 
-<file path=ppt/slides/slide7.xml><?xml version="1.0" encoding="utf-8"?>
-<p:sld xmlns:a="http://schemas.openxmlformats.org/drawingml/2006/main" xmlns:p="http://schemas.openxmlformats.org/presentationml/2006/main" xmlns:r="http://schemas.openxmlformats.org/officeDocument/2006/relationships">
+<file path=ppt/slides/slide8.xml><?xml version="1.0" encoding="utf-8"?>
+<p:sld xmlns:a="http://schemas.openxmlformats.org/drawingml/2006/main" xmlns:r="http://schemas.openxmlformats.org/officeDocument/2006/relationships" xmlns:p="http://schemas.openxmlformats.org/presentationml/2006/main">
   <p:cSld>
     <p:spTree>
       <p:nvGrpSpPr>
@@ -4048,7 +4446,14 @@
         <p:cNvGrpSpPr/>
         <p:nvPr/>
       </p:nvGrpSpPr>
-      <p:grpSpPr/>
+      <p:grpSpPr>
+        <a:xfrm>
+          <a:off x="0" y="0"/>
+          <a:ext cx="0" cy="0"/>
+          <a:chOff x="0" y="0"/>
+          <a:chExt cx="0" cy="0"/>
+        </a:xfrm>
+      </p:grpSpPr>
       <p:sp>
         <p:nvSpPr>
           <p:cNvPr id="2" name="Rectangle 1"/>
@@ -4085,7 +4490,7 @@
           </a:fontRef>
         </p:style>
         <p:txBody>
-          <a:bodyPr rtlCol="0" anchor="ctr" wrap="square" lIns="731520" tIns="137160"/>
+          <a:bodyPr wrap="square" lIns="731520" tIns="137160" rtlCol="0" anchor="ctr"/>
           <a:lstStyle/>
           <a:p>
             <a:pPr algn="l">
@@ -4096,7 +4501,7 @@
               </a:defRPr>
             </a:pPr>
             <a:r>
-              <a:t>GitHub仓库与代码管理</a:t>
+              <a:t>总结与展望</a:t>
             </a:r>
           </a:p>
         </p:txBody>
@@ -4134,174 +4539,6 @@
               </a:defRPr>
             </a:pPr>
             <a:r>
-              <a:t>● 仓库地址：https://github.com/cty23/project（公开）</a:t>
-            </a:r>
-          </a:p>
-          <a:p>
-            <a:pPr algn="l">
-              <a:spcAft>
-                <a:spcPts val="1000"/>
-              </a:spcAft>
-              <a:defRPr sz="1800">
-                <a:solidFill>
-                  <a:srgbClr val="333333"/>
-                </a:solidFill>
-              </a:defRPr>
-            </a:pPr>
-            <a:r>
-              <a:t>● 完整项目结构：backend / frontend / database / README / requirements</a:t>
-            </a:r>
-          </a:p>
-          <a:p>
-            <a:pPr algn="l">
-              <a:spcAft>
-                <a:spcPts val="1000"/>
-              </a:spcAft>
-              <a:defRPr sz="1800">
-                <a:solidFill>
-                  <a:srgbClr val="333333"/>
-                </a:solidFill>
-              </a:defRPr>
-            </a:pPr>
-            <a:r>
-              <a:t>● 包含完整运行说明：环境要求、安装步骤、启动方法、测试账号</a:t>
-            </a:r>
-          </a:p>
-          <a:p>
-            <a:pPr algn="l">
-              <a:spcAft>
-                <a:spcPts val="1000"/>
-              </a:spcAft>
-              <a:defRPr sz="1800">
-                <a:solidFill>
-                  <a:srgbClr val="333333"/>
-                </a:solidFill>
-              </a:defRPr>
-            </a:pPr>
-            <a:r>
-              <a:t>● 版本控制：Git + SSH密钥认证</a:t>
-            </a:r>
-          </a:p>
-          <a:p>
-            <a:pPr algn="l">
-              <a:spcAft>
-                <a:spcPts val="1000"/>
-              </a:spcAft>
-              <a:defRPr sz="1800">
-                <a:solidFill>
-                  <a:srgbClr val="333333"/>
-                </a:solidFill>
-              </a:defRPr>
-            </a:pPr>
-            <a:r>
-              <a:t>（此处插入GitHub仓库截图）</a:t>
-            </a:r>
-          </a:p>
-        </p:txBody>
-      </p:sp>
-    </p:spTree>
-  </p:cSld>
-  <p:clrMapOvr>
-    <a:masterClrMapping/>
-  </p:clrMapOvr>
-</p:sld>
-</file>
-
-<file path=ppt/slides/slide8.xml><?xml version="1.0" encoding="utf-8"?>
-<p:sld xmlns:a="http://schemas.openxmlformats.org/drawingml/2006/main" xmlns:p="http://schemas.openxmlformats.org/presentationml/2006/main" xmlns:r="http://schemas.openxmlformats.org/officeDocument/2006/relationships">
-  <p:cSld>
-    <p:spTree>
-      <p:nvGrpSpPr>
-        <p:cNvPr id="1" name=""/>
-        <p:cNvGrpSpPr/>
-        <p:nvPr/>
-      </p:nvGrpSpPr>
-      <p:grpSpPr/>
-      <p:sp>
-        <p:nvSpPr>
-          <p:cNvPr id="2" name="Rectangle 1"/>
-          <p:cNvSpPr/>
-          <p:nvPr/>
-        </p:nvSpPr>
-        <p:spPr>
-          <a:xfrm>
-            <a:off x="0" y="0"/>
-            <a:ext cx="12191695" cy="1097280"/>
-          </a:xfrm>
-          <a:prstGeom prst="rect">
-            <a:avLst/>
-          </a:prstGeom>
-          <a:solidFill>
-            <a:srgbClr val="003366"/>
-          </a:solidFill>
-          <a:ln>
-            <a:noFill/>
-          </a:ln>
-        </p:spPr>
-        <p:style>
-          <a:lnRef idx="1">
-            <a:schemeClr val="accent1"/>
-          </a:lnRef>
-          <a:fillRef idx="3">
-            <a:schemeClr val="accent1"/>
-          </a:fillRef>
-          <a:effectRef idx="2">
-            <a:schemeClr val="accent1"/>
-          </a:effectRef>
-          <a:fontRef idx="minor">
-            <a:schemeClr val="lt1"/>
-          </a:fontRef>
-        </p:style>
-        <p:txBody>
-          <a:bodyPr rtlCol="0" anchor="ctr" wrap="square" lIns="731520" tIns="137160"/>
-          <a:lstStyle/>
-          <a:p>
-            <a:pPr algn="l">
-              <a:defRPr sz="3200" b="1">
-                <a:solidFill>
-                  <a:srgbClr val="FFFFFF"/>
-                </a:solidFill>
-              </a:defRPr>
-            </a:pPr>
-            <a:r>
-              <a:t>总结与展望</a:t>
-            </a:r>
-          </a:p>
-        </p:txBody>
-      </p:sp>
-      <p:sp>
-        <p:nvSpPr>
-          <p:cNvPr id="3" name="TextBox 2"/>
-          <p:cNvSpPr txBox="1"/>
-          <p:nvPr/>
-        </p:nvSpPr>
-        <p:spPr>
-          <a:xfrm>
-            <a:off x="731520" y="1371600"/>
-            <a:ext cx="10515600" cy="5029200"/>
-          </a:xfrm>
-          <a:prstGeom prst="rect">
-            <a:avLst/>
-          </a:prstGeom>
-          <a:noFill/>
-        </p:spPr>
-        <p:txBody>
-          <a:bodyPr wrap="square">
-            <a:spAutoFit/>
-          </a:bodyPr>
-          <a:lstStyle/>
-          <a:p>
-            <a:pPr algn="l">
-              <a:spcAft>
-                <a:spcPts val="1000"/>
-              </a:spcAft>
-              <a:defRPr sz="1800">
-                <a:solidFill>
-                  <a:srgbClr val="333333"/>
-                </a:solidFill>
-              </a:defRPr>
-            </a:pPr>
-            <a:r>
               <a:t>● 已完成：3角色权限分流、每角色3+核心功能、ECharts数据可视化、GitHub公开仓库</a:t>
             </a:r>
           </a:p>
@@ -4361,7 +4598,7 @@
 </file>
 
 <file path=ppt/slides/slide9.xml><?xml version="1.0" encoding="utf-8"?>
-<p:sld xmlns:a="http://schemas.openxmlformats.org/drawingml/2006/main" xmlns:p="http://schemas.openxmlformats.org/presentationml/2006/main" xmlns:r="http://schemas.openxmlformats.org/officeDocument/2006/relationships">
+<p:sld xmlns:a="http://schemas.openxmlformats.org/drawingml/2006/main" xmlns:r="http://schemas.openxmlformats.org/officeDocument/2006/relationships" xmlns:p="http://schemas.openxmlformats.org/presentationml/2006/main">
   <p:cSld>
     <p:bg>
       <p:bgPr>
@@ -4377,7 +4614,14 @@
         <p:cNvGrpSpPr/>
         <p:nvPr/>
       </p:nvGrpSpPr>
-      <p:grpSpPr/>
+      <p:grpSpPr>
+        <a:xfrm>
+          <a:off x="0" y="0"/>
+          <a:ext cx="0" cy="0"/>
+          <a:chOff x="0" y="0"/>
+          <a:chExt cx="0" cy="0"/>
+        </a:xfrm>
+      </p:grpSpPr>
       <p:sp>
         <p:nvSpPr>
           <p:cNvPr id="2" name="Rectangle 1"/>
@@ -4418,6 +4662,7 @@
           <a:lstStyle/>
           <a:p>
             <a:pPr algn="ctr"/>
+            <a:endParaRPr/>
           </a:p>
         </p:txBody>
       </p:sp>
